--- a/courseware/DSA_CH12_Advanced_Structures.pptx
+++ b/courseware/DSA_CH12_Advanced_Structures.pptx
@@ -11896,7 +11896,7 @@
                 <a:latin typeface="Segoe UI"/>
                 <a:ea typeface="微软雅黑"/>
               </a:rPr>
-              <a:t>（splaying tree）由 Hopcroft 与 Tarjan 于 1985 年发明</a:t>
+              <a:t>（splaying tree）由 Sleator 与 Tarjan 于 1985 年发表</a:t>
             </a:r>
           </a:p>
           <a:p>

--- a/courseware/DSA_CH12_Advanced_Structures.pptx
+++ b/courseware/DSA_CH12_Advanced_Structures.pptx
@@ -13457,7 +13457,7 @@
                 <a:latin typeface="Segoe UI"/>
                 <a:ea typeface="微软雅黑"/>
               </a:rPr>
-              <a:t>345 道</a:t>
+              <a:t>344 道</a:t>
             </a:r>
             <a:r>
               <a:rPr sz="1900" b="0" i="0">
